--- a/docs/report-docs/Slide_Tongquan.pptx
+++ b/docs/report-docs/Slide_Tongquan.pptx
@@ -230,7 +230,7 @@
           <a:p>
             <a:fld id="{1D8BD707-D9CF-40AE-B4C6-C98DA3205C09}" type="datetimeFigureOut">
               <a:rPr lang="en-US"/>
-              <a:t>10/1/26</a:t>
+              <a:t>10/1/2026</a:t>
             </a:fld>
             <a:endParaRPr lang="en-US"/>
           </a:p>
@@ -446,7 +446,7 @@
           <a:p>
             <a:fld id="{1D8BD707-D9CF-40AE-B4C6-C98DA3205C09}" type="datetimeFigureOut">
               <a:rPr lang="en-US"/>
-              <a:t>10/1/26</a:t>
+              <a:t>10/1/2026</a:t>
             </a:fld>
             <a:endParaRPr lang="en-US"/>
           </a:p>
@@ -669,7 +669,7 @@
           <a:p>
             <a:fld id="{1D8BD707-D9CF-40AE-B4C6-C98DA3205C09}" type="datetimeFigureOut">
               <a:rPr lang="en-US"/>
-              <a:t>10/1/26</a:t>
+              <a:t>10/1/2026</a:t>
             </a:fld>
             <a:endParaRPr lang="en-US"/>
           </a:p>
@@ -856,7 +856,7 @@
           <a:p>
             <a:fld id="{1D8BD707-D9CF-40AE-B4C6-C98DA3205C09}" type="datetimeFigureOut">
               <a:rPr lang="en-US"/>
-              <a:t>10/1/26</a:t>
+              <a:t>10/1/2026</a:t>
             </a:fld>
             <a:endParaRPr lang="en-US"/>
           </a:p>
@@ -984,7 +984,7 @@
           <a:p>
             <a:fld id="{1D8BD707-D9CF-40AE-B4C6-C98DA3205C09}" type="datetimeFigureOut">
               <a:rPr lang="en-US"/>
-              <a:t>10/1/26</a:t>
+              <a:t>10/1/2026</a:t>
             </a:fld>
             <a:endParaRPr lang="en-US"/>
           </a:p>
@@ -1218,7 +1218,7 @@
           <a:p>
             <a:fld id="{1D8BD707-D9CF-40AE-B4C6-C98DA3205C09}" type="datetimeFigureOut">
               <a:rPr lang="en-US"/>
-              <a:t>10/1/26</a:t>
+              <a:t>10/1/2026</a:t>
             </a:fld>
             <a:endParaRPr lang="en-US"/>
           </a:p>
@@ -3322,7 +3322,7 @@
               </a:rPr>
               <a:t>Fabric</a:t>
             </a:r>
-            <a:endParaRPr sz="1100">
+            <a:endParaRPr sz="1100" dirty="0">
               <a:latin typeface="Arial"/>
               <a:cs typeface="Arial"/>
             </a:endParaRPr>
@@ -3512,7 +3512,7 @@
               </a:rPr>
               <a:t>tầng.</a:t>
             </a:r>
-            <a:endParaRPr sz="1100">
+            <a:endParaRPr sz="1100" dirty="0">
               <a:latin typeface="Tahoma"/>
               <a:cs typeface="Tahoma"/>
             </a:endParaRPr>
@@ -3744,7 +3744,7 @@
               </a:rPr>
               <a:t>nhất.</a:t>
             </a:r>
-            <a:endParaRPr sz="1100">
+            <a:endParaRPr sz="1100" dirty="0">
               <a:latin typeface="Tahoma"/>
               <a:cs typeface="Tahoma"/>
             </a:endParaRPr>
@@ -3911,7 +3911,7 @@
               </a:rPr>
               <a:t>bản.</a:t>
             </a:r>
-            <a:endParaRPr sz="1100">
+            <a:endParaRPr sz="1100" dirty="0">
               <a:latin typeface="Tahoma"/>
               <a:cs typeface="Tahoma"/>
             </a:endParaRPr>
@@ -3925,7 +3925,7 @@
                 <a:spcPts val="95"/>
               </a:spcBef>
             </a:pPr>
-            <a:endParaRPr sz="1100">
+            <a:endParaRPr sz="1100" dirty="0">
               <a:latin typeface="Tahoma"/>
               <a:cs typeface="Tahoma"/>
             </a:endParaRPr>
@@ -3947,7 +3947,7 @@
               </a:rPr>
               <a:t>Polygon.io</a:t>
             </a:r>
-            <a:endParaRPr sz="1100">
+            <a:endParaRPr sz="1100" dirty="0">
               <a:latin typeface="Arial"/>
               <a:cs typeface="Arial"/>
             </a:endParaRPr>
@@ -4116,7 +4116,7 @@
               </a:rPr>
               <a:t>forex).</a:t>
             </a:r>
-            <a:endParaRPr sz="1100">
+            <a:endParaRPr sz="1100" dirty="0">
               <a:latin typeface="Tahoma"/>
               <a:cs typeface="Tahoma"/>
             </a:endParaRPr>
@@ -4252,29 +4252,15 @@
             </a:r>
             <a:r>
               <a:rPr sz="1100" spc="114" dirty="0">
-                <a:latin typeface="Tahoma"/>
-                <a:cs typeface="Tahoma"/>
-              </a:rPr>
-              <a:t>(</a:t>
-            </a:r>
-            <a:r>
-              <a:rPr sz="1100" spc="114" dirty="0">
-                <a:latin typeface="Palatino Linotype"/>
-                <a:cs typeface="Palatino Linotype"/>
-              </a:rPr>
-              <a:t>/v1/{resource}/...</a:t>
-            </a:r>
-            <a:r>
-              <a:rPr sz="1100" spc="114" dirty="0">
-                <a:latin typeface="Tahoma"/>
-                <a:cs typeface="Tahoma"/>
-              </a:rPr>
-              <a:t>)</a:t>
+                <a:latin typeface="Arial" panose="020B0604020202020204" pitchFamily="34" charset="0"/>
+                <a:cs typeface="Arial" panose="020B0604020202020204" pitchFamily="34" charset="0"/>
+              </a:rPr>
+              <a:t>(/v1/{resource}/...)</a:t>
             </a:r>
             <a:r>
               <a:rPr sz="1100" spc="10" dirty="0">
-                <a:latin typeface="Tahoma"/>
-                <a:cs typeface="Tahoma"/>
+                <a:latin typeface="Arial" panose="020B0604020202020204" pitchFamily="34" charset="0"/>
+                <a:cs typeface="Arial" panose="020B0604020202020204" pitchFamily="34" charset="0"/>
               </a:rPr>
               <a:t> </a:t>
             </a:r>
@@ -4292,7 +4278,7 @@
               </a:rPr>
               <a:t>WebSocket.</a:t>
             </a:r>
-            <a:endParaRPr sz="1100">
+            <a:endParaRPr sz="1100" dirty="0">
               <a:latin typeface="Tahoma"/>
               <a:cs typeface="Tahoma"/>
             </a:endParaRPr>
@@ -4466,7 +4452,7 @@
               </a:rPr>
               <a:t>FDP.</a:t>
             </a:r>
-            <a:endParaRPr sz="1100">
+            <a:endParaRPr sz="1100" dirty="0">
               <a:latin typeface="Tahoma"/>
               <a:cs typeface="Tahoma"/>
             </a:endParaRPr>
